--- a/docs/lessons/week-06-numbers-into-narrative.pptx
+++ b/docs/lessons/week-06-numbers-into-narrative.pptx
@@ -1862,6 +1862,45 @@
         </p:nvSpPr>
         <p:spPr>
           <a:xfrm>
+            <a:off x="548640" y="6419088"/>
+            <a:ext cx="3108960" cy="274320"/>
+          </a:xfrm>
+          <a:prstGeom prst="rect">
+            <a:avLst/>
+          </a:prstGeom>
+          <a:noFill/>
+          <a:ln/>
+        </p:spPr>
+        <p:txBody>
+          <a:bodyPr wrap="square" lIns="0" tIns="0" rIns="0" bIns="0" rtlCol="0" anchor="ctr"/>
+          <a:lstStyle/>
+          <a:p>
+            <a:pPr indent="0" marL="0">
+              <a:buNone/>
+            </a:pPr>
+            <a:r>
+              <a:rPr lang="en-US" sz="900" dirty="0">
+                <a:solidFill>
+                  <a:srgbClr val="A9B6AE"/>
+                </a:solidFill>
+                <a:latin typeface="Calibri" pitchFamily="34" charset="0"/>
+                <a:ea typeface="Calibri" pitchFamily="34" charset="-122"/>
+                <a:cs typeface="Calibri" pitchFamily="34" charset="-120"/>
+              </a:rPr>
+              <a:t>Education, not advice.</a:t>
+            </a:r>
+            <a:endParaRPr lang="en-US" sz="900" dirty="0"/>
+          </a:p>
+        </p:txBody>
+      </p:sp>
+      <p:sp>
+        <p:nvSpPr>
+          <p:cNvPr id="3" name="Text 1"/>
+          <p:cNvSpPr txBox="1"/>
+          <p:nvPr/>
+        </p:nvSpPr>
+        <p:spPr>
+          <a:xfrm>
             <a:off x="822960" y="1051560"/>
             <a:ext cx="10515600" cy="365760"/>
           </a:xfrm>
@@ -1895,7 +1934,7 @@
       </p:sp>
       <p:sp>
         <p:nvSpPr>
-          <p:cNvPr id="3" name="Text 1"/>
+          <p:cNvPr id="4" name="Text 2"/>
           <p:cNvSpPr txBox="1"/>
           <p:nvPr/>
         </p:nvSpPr>
@@ -1934,7 +1973,7 @@
       </p:sp>
       <p:sp>
         <p:nvSpPr>
-          <p:cNvPr id="4" name="Text 2"/>
+          <p:cNvPr id="5" name="Text 3"/>
           <p:cNvSpPr txBox="1"/>
           <p:nvPr/>
         </p:nvSpPr>
@@ -1976,7 +2015,7 @@
       </p:sp>
       <p:sp>
         <p:nvSpPr>
-          <p:cNvPr id="5" name="Text 3"/>
+          <p:cNvPr id="6" name="Text 4"/>
           <p:cNvSpPr txBox="1"/>
           <p:nvPr/>
         </p:nvSpPr>
@@ -2019,7 +2058,7 @@
       </p:sp>
       <p:sp>
         <p:nvSpPr>
-          <p:cNvPr id="6" name="Text 4"/>
+          <p:cNvPr id="7" name="Text 5"/>
           <p:cNvSpPr txBox="1"/>
           <p:nvPr/>
         </p:nvSpPr>
@@ -2096,6 +2135,45 @@
         </p:nvSpPr>
         <p:spPr>
           <a:xfrm>
+            <a:off x="548640" y="6419088"/>
+            <a:ext cx="3108960" cy="274320"/>
+          </a:xfrm>
+          <a:prstGeom prst="rect">
+            <a:avLst/>
+          </a:prstGeom>
+          <a:noFill/>
+          <a:ln/>
+        </p:spPr>
+        <p:txBody>
+          <a:bodyPr wrap="square" lIns="0" tIns="0" rIns="0" bIns="0" rtlCol="0" anchor="ctr"/>
+          <a:lstStyle/>
+          <a:p>
+            <a:pPr indent="0" marL="0">
+              <a:buNone/>
+            </a:pPr>
+            <a:r>
+              <a:rPr lang="en-US" sz="900" dirty="0">
+                <a:solidFill>
+                  <a:srgbClr val="6B7A72"/>
+                </a:solidFill>
+                <a:latin typeface="Calibri" pitchFamily="34" charset="0"/>
+                <a:ea typeface="Calibri" pitchFamily="34" charset="-122"/>
+                <a:cs typeface="Calibri" pitchFamily="34" charset="-120"/>
+              </a:rPr>
+              <a:t>Education, not advice.</a:t>
+            </a:r>
+            <a:endParaRPr lang="en-US" sz="900" dirty="0"/>
+          </a:p>
+        </p:txBody>
+      </p:sp>
+      <p:sp>
+        <p:nvSpPr>
+          <p:cNvPr id="3" name="Text 1"/>
+          <p:cNvSpPr txBox="1"/>
+          <p:nvPr/>
+        </p:nvSpPr>
+        <p:spPr>
+          <a:xfrm>
             <a:off x="822960" y="502920"/>
             <a:ext cx="9144000" cy="320040"/>
           </a:xfrm>
@@ -2129,7 +2207,7 @@
       </p:sp>
       <p:sp>
         <p:nvSpPr>
-          <p:cNvPr id="3" name="Text 1"/>
+          <p:cNvPr id="4" name="Text 2"/>
           <p:cNvSpPr txBox="1"/>
           <p:nvPr/>
         </p:nvSpPr>
@@ -2168,7 +2246,7 @@
       </p:sp>
       <p:sp>
         <p:nvSpPr>
-          <p:cNvPr id="4" name="Shape 2"/>
+          <p:cNvPr id="5" name="Shape 3"/>
           <p:cNvSpPr/>
           <p:nvPr/>
         </p:nvSpPr>
@@ -2202,7 +2280,7 @@
       </p:sp>
       <p:sp>
         <p:nvSpPr>
-          <p:cNvPr id="5" name="Text 3"/>
+          <p:cNvPr id="6" name="Text 4"/>
           <p:cNvSpPr txBox="1"/>
           <p:nvPr/>
         </p:nvSpPr>
@@ -2241,7 +2319,7 @@
       </p:sp>
       <p:sp>
         <p:nvSpPr>
-          <p:cNvPr id="6" name="Text 4"/>
+          <p:cNvPr id="7" name="Text 5"/>
           <p:cNvSpPr txBox="1"/>
           <p:nvPr/>
         </p:nvSpPr>
@@ -2283,7 +2361,7 @@
       </p:sp>
       <p:sp>
         <p:nvSpPr>
-          <p:cNvPr id="7" name="Shape 5"/>
+          <p:cNvPr id="8" name="Shape 6"/>
           <p:cNvSpPr/>
           <p:nvPr/>
         </p:nvSpPr>
@@ -2317,7 +2395,7 @@
       </p:sp>
       <p:sp>
         <p:nvSpPr>
-          <p:cNvPr id="8" name="Text 6"/>
+          <p:cNvPr id="9" name="Text 7"/>
           <p:cNvSpPr txBox="1"/>
           <p:nvPr/>
         </p:nvSpPr>
@@ -2356,7 +2434,7 @@
       </p:sp>
       <p:sp>
         <p:nvSpPr>
-          <p:cNvPr id="9" name="Text 7"/>
+          <p:cNvPr id="10" name="Text 8"/>
           <p:cNvSpPr txBox="1"/>
           <p:nvPr/>
         </p:nvSpPr>
@@ -2398,7 +2476,7 @@
       </p:sp>
       <p:sp>
         <p:nvSpPr>
-          <p:cNvPr id="10" name="Shape 8"/>
+          <p:cNvPr id="11" name="Shape 9"/>
           <p:cNvSpPr/>
           <p:nvPr/>
         </p:nvSpPr>
@@ -2432,7 +2510,7 @@
       </p:sp>
       <p:sp>
         <p:nvSpPr>
-          <p:cNvPr id="11" name="Text 9"/>
+          <p:cNvPr id="12" name="Text 10"/>
           <p:cNvSpPr txBox="1"/>
           <p:nvPr/>
         </p:nvSpPr>
@@ -2471,7 +2549,7 @@
       </p:sp>
       <p:sp>
         <p:nvSpPr>
-          <p:cNvPr id="12" name="Text 10"/>
+          <p:cNvPr id="13" name="Text 11"/>
           <p:cNvSpPr txBox="1"/>
           <p:nvPr/>
         </p:nvSpPr>
@@ -2508,45 +2586,6 @@
               <a:t>…is selling the list. A free tool that says “nothing today” is telling you about the market, not about itself.</a:t>
             </a:r>
             <a:endParaRPr lang="en-US" sz="1350" dirty="0"/>
-          </a:p>
-        </p:txBody>
-      </p:sp>
-      <p:sp>
-        <p:nvSpPr>
-          <p:cNvPr id="13" name="Text 11"/>
-          <p:cNvSpPr txBox="1"/>
-          <p:nvPr/>
-        </p:nvSpPr>
-        <p:spPr>
-          <a:xfrm>
-            <a:off x="548640" y="6419088"/>
-            <a:ext cx="3108960" cy="274320"/>
-          </a:xfrm>
-          <a:prstGeom prst="rect">
-            <a:avLst/>
-          </a:prstGeom>
-          <a:noFill/>
-          <a:ln/>
-        </p:spPr>
-        <p:txBody>
-          <a:bodyPr wrap="square" lIns="0" tIns="0" rIns="0" bIns="0" rtlCol="0" anchor="ctr"/>
-          <a:lstStyle/>
-          <a:p>
-            <a:pPr indent="0" marL="0">
-              <a:buNone/>
-            </a:pPr>
-            <a:r>
-              <a:rPr lang="en-US" sz="900" dirty="0">
-                <a:solidFill>
-                  <a:srgbClr val="6B7A72"/>
-                </a:solidFill>
-                <a:latin typeface="Calibri" pitchFamily="34" charset="0"/>
-                <a:ea typeface="Calibri" pitchFamily="34" charset="-122"/>
-                <a:cs typeface="Calibri" pitchFamily="34" charset="-120"/>
-              </a:rPr>
-              <a:t>Education, not advice.</a:t>
-            </a:r>
-            <a:endParaRPr lang="en-US" sz="900" dirty="0"/>
           </a:p>
         </p:txBody>
       </p:sp>
@@ -2590,6 +2629,45 @@
         </p:nvSpPr>
         <p:spPr>
           <a:xfrm>
+            <a:off x="548640" y="6419088"/>
+            <a:ext cx="3108960" cy="274320"/>
+          </a:xfrm>
+          <a:prstGeom prst="rect">
+            <a:avLst/>
+          </a:prstGeom>
+          <a:noFill/>
+          <a:ln/>
+        </p:spPr>
+        <p:txBody>
+          <a:bodyPr wrap="square" lIns="0" tIns="0" rIns="0" bIns="0" rtlCol="0" anchor="ctr"/>
+          <a:lstStyle/>
+          <a:p>
+            <a:pPr indent="0" marL="0">
+              <a:buNone/>
+            </a:pPr>
+            <a:r>
+              <a:rPr lang="en-US" sz="900" dirty="0">
+                <a:solidFill>
+                  <a:srgbClr val="6B7A72"/>
+                </a:solidFill>
+                <a:latin typeface="Calibri" pitchFamily="34" charset="0"/>
+                <a:ea typeface="Calibri" pitchFamily="34" charset="-122"/>
+                <a:cs typeface="Calibri" pitchFamily="34" charset="-120"/>
+              </a:rPr>
+              <a:t>Education, not advice.</a:t>
+            </a:r>
+            <a:endParaRPr lang="en-US" sz="900" dirty="0"/>
+          </a:p>
+        </p:txBody>
+      </p:sp>
+      <p:sp>
+        <p:nvSpPr>
+          <p:cNvPr id="3" name="Text 1"/>
+          <p:cNvSpPr txBox="1"/>
+          <p:nvPr/>
+        </p:nvSpPr>
+        <p:spPr>
+          <a:xfrm>
             <a:off x="822960" y="502920"/>
             <a:ext cx="9144000" cy="320040"/>
           </a:xfrm>
@@ -2623,7 +2701,7 @@
       </p:sp>
       <p:sp>
         <p:nvSpPr>
-          <p:cNvPr id="3" name="Text 1"/>
+          <p:cNvPr id="4" name="Text 2"/>
           <p:cNvSpPr txBox="1"/>
           <p:nvPr/>
         </p:nvSpPr>
@@ -2662,7 +2740,7 @@
       </p:sp>
       <p:sp>
         <p:nvSpPr>
-          <p:cNvPr id="4" name="Shape 2"/>
+          <p:cNvPr id="5" name="Shape 3"/>
           <p:cNvSpPr/>
           <p:nvPr/>
         </p:nvSpPr>
@@ -2696,7 +2774,7 @@
       </p:sp>
       <p:sp>
         <p:nvSpPr>
-          <p:cNvPr id="5" name="Text 3"/>
+          <p:cNvPr id="6" name="Text 4"/>
           <p:cNvSpPr txBox="1"/>
           <p:nvPr/>
         </p:nvSpPr>
@@ -2735,7 +2813,7 @@
       </p:sp>
       <p:sp>
         <p:nvSpPr>
-          <p:cNvPr id="6" name="Text 4"/>
+          <p:cNvPr id="7" name="Text 5"/>
           <p:cNvSpPr txBox="1"/>
           <p:nvPr/>
         </p:nvSpPr>
@@ -2777,7 +2855,7 @@
       </p:sp>
       <p:sp>
         <p:nvSpPr>
-          <p:cNvPr id="7" name="Shape 5"/>
+          <p:cNvPr id="8" name="Shape 6"/>
           <p:cNvSpPr/>
           <p:nvPr/>
         </p:nvSpPr>
@@ -2811,7 +2889,7 @@
       </p:sp>
       <p:sp>
         <p:nvSpPr>
-          <p:cNvPr id="8" name="Text 6"/>
+          <p:cNvPr id="9" name="Text 7"/>
           <p:cNvSpPr txBox="1"/>
           <p:nvPr/>
         </p:nvSpPr>
@@ -2850,7 +2928,7 @@
       </p:sp>
       <p:sp>
         <p:nvSpPr>
-          <p:cNvPr id="9" name="Text 7"/>
+          <p:cNvPr id="10" name="Text 8"/>
           <p:cNvSpPr txBox="1"/>
           <p:nvPr/>
         </p:nvSpPr>
@@ -2892,7 +2970,7 @@
       </p:sp>
       <p:sp>
         <p:nvSpPr>
-          <p:cNvPr id="10" name="Shape 8"/>
+          <p:cNvPr id="11" name="Shape 9"/>
           <p:cNvSpPr/>
           <p:nvPr/>
         </p:nvSpPr>
@@ -2926,7 +3004,7 @@
       </p:sp>
       <p:sp>
         <p:nvSpPr>
-          <p:cNvPr id="11" name="Text 9"/>
+          <p:cNvPr id="12" name="Text 10"/>
           <p:cNvSpPr txBox="1"/>
           <p:nvPr/>
         </p:nvSpPr>
@@ -2965,7 +3043,7 @@
       </p:sp>
       <p:sp>
         <p:nvSpPr>
-          <p:cNvPr id="12" name="Text 10"/>
+          <p:cNvPr id="13" name="Text 11"/>
           <p:cNvSpPr txBox="1"/>
           <p:nvPr/>
         </p:nvSpPr>
@@ -3007,7 +3085,7 @@
       </p:sp>
       <p:sp>
         <p:nvSpPr>
-          <p:cNvPr id="13" name="Text 11"/>
+          <p:cNvPr id="14" name="Text 12"/>
           <p:cNvSpPr txBox="1"/>
           <p:nvPr/>
         </p:nvSpPr>
@@ -3041,45 +3119,6 @@
               <a:t>“We grade decisions, not outcomes.”</a:t>
             </a:r>
             <a:endParaRPr lang="en-US" sz="2400" dirty="0"/>
-          </a:p>
-        </p:txBody>
-      </p:sp>
-      <p:sp>
-        <p:nvSpPr>
-          <p:cNvPr id="14" name="Text 12"/>
-          <p:cNvSpPr txBox="1"/>
-          <p:nvPr/>
-        </p:nvSpPr>
-        <p:spPr>
-          <a:xfrm>
-            <a:off x="548640" y="6419088"/>
-            <a:ext cx="3108960" cy="274320"/>
-          </a:xfrm>
-          <a:prstGeom prst="rect">
-            <a:avLst/>
-          </a:prstGeom>
-          <a:noFill/>
-          <a:ln/>
-        </p:spPr>
-        <p:txBody>
-          <a:bodyPr wrap="square" lIns="0" tIns="0" rIns="0" bIns="0" rtlCol="0" anchor="ctr"/>
-          <a:lstStyle/>
-          <a:p>
-            <a:pPr indent="0" marL="0">
-              <a:buNone/>
-            </a:pPr>
-            <a:r>
-              <a:rPr lang="en-US" sz="900" dirty="0">
-                <a:solidFill>
-                  <a:srgbClr val="6B7A72"/>
-                </a:solidFill>
-                <a:latin typeface="Calibri" pitchFamily="34" charset="0"/>
-                <a:ea typeface="Calibri" pitchFamily="34" charset="-122"/>
-                <a:cs typeface="Calibri" pitchFamily="34" charset="-120"/>
-              </a:rPr>
-              <a:t>Education, not advice.</a:t>
-            </a:r>
-            <a:endParaRPr lang="en-US" sz="900" dirty="0"/>
           </a:p>
         </p:txBody>
       </p:sp>
@@ -3123,6 +3162,45 @@
         </p:nvSpPr>
         <p:spPr>
           <a:xfrm>
+            <a:off x="548640" y="6419088"/>
+            <a:ext cx="3108960" cy="274320"/>
+          </a:xfrm>
+          <a:prstGeom prst="rect">
+            <a:avLst/>
+          </a:prstGeom>
+          <a:noFill/>
+          <a:ln/>
+        </p:spPr>
+        <p:txBody>
+          <a:bodyPr wrap="square" lIns="0" tIns="0" rIns="0" bIns="0" rtlCol="0" anchor="ctr"/>
+          <a:lstStyle/>
+          <a:p>
+            <a:pPr indent="0" marL="0">
+              <a:buNone/>
+            </a:pPr>
+            <a:r>
+              <a:rPr lang="en-US" sz="900" dirty="0">
+                <a:solidFill>
+                  <a:srgbClr val="A9B6AE"/>
+                </a:solidFill>
+                <a:latin typeface="Calibri" pitchFamily="34" charset="0"/>
+                <a:ea typeface="Calibri" pitchFamily="34" charset="-122"/>
+                <a:cs typeface="Calibri" pitchFamily="34" charset="-120"/>
+              </a:rPr>
+              <a:t>Education, not advice.</a:t>
+            </a:r>
+            <a:endParaRPr lang="en-US" sz="900" dirty="0"/>
+          </a:p>
+        </p:txBody>
+      </p:sp>
+      <p:sp>
+        <p:nvSpPr>
+          <p:cNvPr id="3" name="Text 1"/>
+          <p:cNvSpPr txBox="1"/>
+          <p:nvPr/>
+        </p:nvSpPr>
+        <p:spPr>
+          <a:xfrm>
             <a:off x="822960" y="731520"/>
             <a:ext cx="10058400" cy="365760"/>
           </a:xfrm>
@@ -3156,7 +3234,7 @@
       </p:sp>
       <p:sp>
         <p:nvSpPr>
-          <p:cNvPr id="3" name="Text 1"/>
+          <p:cNvPr id="4" name="Text 2"/>
           <p:cNvSpPr txBox="1"/>
           <p:nvPr/>
         </p:nvSpPr>
@@ -3195,7 +3273,7 @@
       </p:sp>
       <p:sp>
         <p:nvSpPr>
-          <p:cNvPr id="4" name="Text 2"/>
+          <p:cNvPr id="5" name="Text 3"/>
           <p:cNvSpPr txBox="1"/>
           <p:nvPr/>
         </p:nvSpPr>
@@ -3234,7 +3312,7 @@
       </p:sp>
       <p:sp>
         <p:nvSpPr>
-          <p:cNvPr id="5" name="Shape 3"/>
+          <p:cNvPr id="6" name="Shape 4"/>
           <p:cNvSpPr/>
           <p:nvPr/>
         </p:nvSpPr>
@@ -3261,7 +3339,7 @@
       </p:sp>
       <p:sp>
         <p:nvSpPr>
-          <p:cNvPr id="6" name="Text 4"/>
+          <p:cNvPr id="7" name="Text 5"/>
           <p:cNvSpPr txBox="1"/>
           <p:nvPr/>
         </p:nvSpPr>
@@ -3314,7 +3392,7 @@
       </p:sp>
       <p:sp>
         <p:nvSpPr>
-          <p:cNvPr id="7" name="Shape 5"/>
+          <p:cNvPr id="8" name="Shape 6"/>
           <p:cNvSpPr/>
           <p:nvPr/>
         </p:nvSpPr>
@@ -3341,7 +3419,7 @@
       </p:sp>
       <p:sp>
         <p:nvSpPr>
-          <p:cNvPr id="8" name="Text 6"/>
+          <p:cNvPr id="9" name="Text 7"/>
           <p:cNvSpPr txBox="1"/>
           <p:nvPr/>
         </p:nvSpPr>
@@ -3394,7 +3472,7 @@
       </p:sp>
       <p:sp>
         <p:nvSpPr>
-          <p:cNvPr id="9" name="Shape 7"/>
+          <p:cNvPr id="10" name="Shape 8"/>
           <p:cNvSpPr/>
           <p:nvPr/>
         </p:nvSpPr>
@@ -3421,7 +3499,7 @@
       </p:sp>
       <p:sp>
         <p:nvSpPr>
-          <p:cNvPr id="10" name="Text 8"/>
+          <p:cNvPr id="11" name="Text 9"/>
           <p:cNvSpPr txBox="1"/>
           <p:nvPr/>
         </p:nvSpPr>
@@ -3474,7 +3552,7 @@
       </p:sp>
       <p:sp>
         <p:nvSpPr>
-          <p:cNvPr id="11" name="Text 9"/>
+          <p:cNvPr id="12" name="Text 10"/>
           <p:cNvSpPr txBox="1"/>
           <p:nvPr/>
         </p:nvSpPr>
@@ -3551,6 +3629,45 @@
         </p:nvSpPr>
         <p:spPr>
           <a:xfrm>
+            <a:off x="548640" y="6419088"/>
+            <a:ext cx="3108960" cy="274320"/>
+          </a:xfrm>
+          <a:prstGeom prst="rect">
+            <a:avLst/>
+          </a:prstGeom>
+          <a:noFill/>
+          <a:ln/>
+        </p:spPr>
+        <p:txBody>
+          <a:bodyPr wrap="square" lIns="0" tIns="0" rIns="0" bIns="0" rtlCol="0" anchor="ctr"/>
+          <a:lstStyle/>
+          <a:p>
+            <a:pPr indent="0" marL="0">
+              <a:buNone/>
+            </a:pPr>
+            <a:r>
+              <a:rPr lang="en-US" sz="900" dirty="0">
+                <a:solidFill>
+                  <a:srgbClr val="6B7A72"/>
+                </a:solidFill>
+                <a:latin typeface="Calibri" pitchFamily="34" charset="0"/>
+                <a:ea typeface="Calibri" pitchFamily="34" charset="-122"/>
+                <a:cs typeface="Calibri" pitchFamily="34" charset="-120"/>
+              </a:rPr>
+              <a:t>Education, not advice.</a:t>
+            </a:r>
+            <a:endParaRPr lang="en-US" sz="900" dirty="0"/>
+          </a:p>
+        </p:txBody>
+      </p:sp>
+      <p:sp>
+        <p:nvSpPr>
+          <p:cNvPr id="3" name="Text 1"/>
+          <p:cNvSpPr txBox="1"/>
+          <p:nvPr/>
+        </p:nvSpPr>
+        <p:spPr>
+          <a:xfrm>
             <a:off x="822960" y="502920"/>
             <a:ext cx="9144000" cy="320040"/>
           </a:xfrm>
@@ -3584,7 +3701,7 @@
       </p:sp>
       <p:sp>
         <p:nvSpPr>
-          <p:cNvPr id="3" name="Text 1"/>
+          <p:cNvPr id="4" name="Text 2"/>
           <p:cNvSpPr txBox="1"/>
           <p:nvPr/>
         </p:nvSpPr>
@@ -3623,7 +3740,7 @@
       </p:sp>
       <p:sp>
         <p:nvSpPr>
-          <p:cNvPr id="4" name="Shape 2"/>
+          <p:cNvPr id="5" name="Shape 3"/>
           <p:cNvSpPr/>
           <p:nvPr/>
         </p:nvSpPr>
@@ -3657,7 +3774,7 @@
       </p:sp>
       <p:sp>
         <p:nvSpPr>
-          <p:cNvPr id="5" name="Text 3"/>
+          <p:cNvPr id="6" name="Text 4"/>
           <p:cNvSpPr txBox="1"/>
           <p:nvPr/>
         </p:nvSpPr>
@@ -3696,7 +3813,7 @@
       </p:sp>
       <p:sp>
         <p:nvSpPr>
-          <p:cNvPr id="6" name="Text 4"/>
+          <p:cNvPr id="7" name="Text 5"/>
           <p:cNvSpPr txBox="1"/>
           <p:nvPr/>
         </p:nvSpPr>
@@ -3738,7 +3855,7 @@
       </p:sp>
       <p:sp>
         <p:nvSpPr>
-          <p:cNvPr id="7" name="Shape 5"/>
+          <p:cNvPr id="8" name="Shape 6"/>
           <p:cNvSpPr/>
           <p:nvPr/>
         </p:nvSpPr>
@@ -3772,7 +3889,7 @@
       </p:sp>
       <p:sp>
         <p:nvSpPr>
-          <p:cNvPr id="8" name="Text 6"/>
+          <p:cNvPr id="9" name="Text 7"/>
           <p:cNvSpPr txBox="1"/>
           <p:nvPr/>
         </p:nvSpPr>
@@ -3811,7 +3928,7 @@
       </p:sp>
       <p:sp>
         <p:nvSpPr>
-          <p:cNvPr id="9" name="Text 7"/>
+          <p:cNvPr id="10" name="Text 8"/>
           <p:cNvSpPr txBox="1"/>
           <p:nvPr/>
         </p:nvSpPr>
@@ -3853,7 +3970,7 @@
       </p:sp>
       <p:sp>
         <p:nvSpPr>
-          <p:cNvPr id="10" name="Shape 8"/>
+          <p:cNvPr id="11" name="Shape 9"/>
           <p:cNvSpPr/>
           <p:nvPr/>
         </p:nvSpPr>
@@ -3887,7 +4004,7 @@
       </p:sp>
       <p:sp>
         <p:nvSpPr>
-          <p:cNvPr id="11" name="Text 9"/>
+          <p:cNvPr id="12" name="Text 10"/>
           <p:cNvSpPr txBox="1"/>
           <p:nvPr/>
         </p:nvSpPr>
@@ -3926,7 +4043,7 @@
       </p:sp>
       <p:sp>
         <p:nvSpPr>
-          <p:cNvPr id="12" name="Text 10"/>
+          <p:cNvPr id="13" name="Text 11"/>
           <p:cNvSpPr txBox="1"/>
           <p:nvPr/>
         </p:nvSpPr>
@@ -3963,45 +4080,6 @@
               <a:t>That difference is the whole evening: stories that point at the record, and stories that don't.</a:t>
             </a:r>
             <a:endParaRPr lang="en-US" sz="1350" dirty="0"/>
-          </a:p>
-        </p:txBody>
-      </p:sp>
-      <p:sp>
-        <p:nvSpPr>
-          <p:cNvPr id="13" name="Text 11"/>
-          <p:cNvSpPr txBox="1"/>
-          <p:nvPr/>
-        </p:nvSpPr>
-        <p:spPr>
-          <a:xfrm>
-            <a:off x="548640" y="6419088"/>
-            <a:ext cx="3108960" cy="274320"/>
-          </a:xfrm>
-          <a:prstGeom prst="rect">
-            <a:avLst/>
-          </a:prstGeom>
-          <a:noFill/>
-          <a:ln/>
-        </p:spPr>
-        <p:txBody>
-          <a:bodyPr wrap="square" lIns="0" tIns="0" rIns="0" bIns="0" rtlCol="0" anchor="ctr"/>
-          <a:lstStyle/>
-          <a:p>
-            <a:pPr indent="0" marL="0">
-              <a:buNone/>
-            </a:pPr>
-            <a:r>
-              <a:rPr lang="en-US" sz="900" dirty="0">
-                <a:solidFill>
-                  <a:srgbClr val="6B7A72"/>
-                </a:solidFill>
-                <a:latin typeface="Calibri" pitchFamily="34" charset="0"/>
-                <a:ea typeface="Calibri" pitchFamily="34" charset="-122"/>
-                <a:cs typeface="Calibri" pitchFamily="34" charset="-120"/>
-              </a:rPr>
-              <a:t>Education, not advice.</a:t>
-            </a:r>
-            <a:endParaRPr lang="en-US" sz="900" dirty="0"/>
           </a:p>
         </p:txBody>
       </p:sp>
@@ -4045,6 +4123,45 @@
         </p:nvSpPr>
         <p:spPr>
           <a:xfrm>
+            <a:off x="548640" y="6419088"/>
+            <a:ext cx="3108960" cy="274320"/>
+          </a:xfrm>
+          <a:prstGeom prst="rect">
+            <a:avLst/>
+          </a:prstGeom>
+          <a:noFill/>
+          <a:ln/>
+        </p:spPr>
+        <p:txBody>
+          <a:bodyPr wrap="square" lIns="0" tIns="0" rIns="0" bIns="0" rtlCol="0" anchor="ctr"/>
+          <a:lstStyle/>
+          <a:p>
+            <a:pPr indent="0" marL="0">
+              <a:buNone/>
+            </a:pPr>
+            <a:r>
+              <a:rPr lang="en-US" sz="900" dirty="0">
+                <a:solidFill>
+                  <a:srgbClr val="6B7A72"/>
+                </a:solidFill>
+                <a:latin typeface="Calibri" pitchFamily="34" charset="0"/>
+                <a:ea typeface="Calibri" pitchFamily="34" charset="-122"/>
+                <a:cs typeface="Calibri" pitchFamily="34" charset="-120"/>
+              </a:rPr>
+              <a:t>Education, not advice.</a:t>
+            </a:r>
+            <a:endParaRPr lang="en-US" sz="900" dirty="0"/>
+          </a:p>
+        </p:txBody>
+      </p:sp>
+      <p:sp>
+        <p:nvSpPr>
+          <p:cNvPr id="3" name="Text 1"/>
+          <p:cNvSpPr txBox="1"/>
+          <p:nvPr/>
+        </p:nvSpPr>
+        <p:spPr>
+          <a:xfrm>
             <a:off x="822960" y="502920"/>
             <a:ext cx="9144000" cy="320040"/>
           </a:xfrm>
@@ -4078,7 +4195,7 @@
       </p:sp>
       <p:sp>
         <p:nvSpPr>
-          <p:cNvPr id="3" name="Text 1"/>
+          <p:cNvPr id="4" name="Text 2"/>
           <p:cNvSpPr txBox="1"/>
           <p:nvPr/>
         </p:nvSpPr>
@@ -4117,7 +4234,7 @@
       </p:sp>
       <p:sp>
         <p:nvSpPr>
-          <p:cNvPr id="4" name="Shape 2"/>
+          <p:cNvPr id="5" name="Shape 3"/>
           <p:cNvSpPr/>
           <p:nvPr/>
         </p:nvSpPr>
@@ -4144,7 +4261,7 @@
       </p:sp>
       <p:sp>
         <p:nvSpPr>
-          <p:cNvPr id="5" name="Text 3"/>
+          <p:cNvPr id="6" name="Text 4"/>
           <p:cNvSpPr txBox="1"/>
           <p:nvPr/>
         </p:nvSpPr>
@@ -4183,7 +4300,7 @@
       </p:sp>
       <p:sp>
         <p:nvSpPr>
-          <p:cNvPr id="6" name="Text 4"/>
+          <p:cNvPr id="7" name="Text 5"/>
           <p:cNvSpPr txBox="1"/>
           <p:nvPr/>
         </p:nvSpPr>
@@ -4254,7 +4371,7 @@
       </p:sp>
       <p:sp>
         <p:nvSpPr>
-          <p:cNvPr id="7" name="Shape 5"/>
+          <p:cNvPr id="8" name="Shape 6"/>
           <p:cNvSpPr/>
           <p:nvPr/>
         </p:nvSpPr>
@@ -4281,7 +4398,7 @@
       </p:sp>
       <p:sp>
         <p:nvSpPr>
-          <p:cNvPr id="8" name="Text 6"/>
+          <p:cNvPr id="9" name="Text 7"/>
           <p:cNvSpPr txBox="1"/>
           <p:nvPr/>
         </p:nvSpPr>
@@ -4320,7 +4437,7 @@
       </p:sp>
       <p:sp>
         <p:nvSpPr>
-          <p:cNvPr id="9" name="Text 7"/>
+          <p:cNvPr id="10" name="Text 8"/>
           <p:cNvSpPr txBox="1"/>
           <p:nvPr/>
         </p:nvSpPr>
@@ -4391,7 +4508,7 @@
       </p:sp>
       <p:sp>
         <p:nvSpPr>
-          <p:cNvPr id="10" name="Text 8"/>
+          <p:cNvPr id="11" name="Text 9"/>
           <p:cNvSpPr txBox="1"/>
           <p:nvPr/>
         </p:nvSpPr>
@@ -4425,45 +4542,6 @@
               <a:t>The extra effort buys the right to read small, dull companies the market walked past — at bargain prices only.</a:t>
             </a:r>
             <a:endParaRPr lang="en-US" sz="1900" dirty="0"/>
-          </a:p>
-        </p:txBody>
-      </p:sp>
-      <p:sp>
-        <p:nvSpPr>
-          <p:cNvPr id="11" name="Text 9"/>
-          <p:cNvSpPr txBox="1"/>
-          <p:nvPr/>
-        </p:nvSpPr>
-        <p:spPr>
-          <a:xfrm>
-            <a:off x="548640" y="6419088"/>
-            <a:ext cx="3108960" cy="274320"/>
-          </a:xfrm>
-          <a:prstGeom prst="rect">
-            <a:avLst/>
-          </a:prstGeom>
-          <a:noFill/>
-          <a:ln/>
-        </p:spPr>
-        <p:txBody>
-          <a:bodyPr wrap="square" lIns="0" tIns="0" rIns="0" bIns="0" rtlCol="0" anchor="ctr"/>
-          <a:lstStyle/>
-          <a:p>
-            <a:pPr indent="0" marL="0">
-              <a:buNone/>
-            </a:pPr>
-            <a:r>
-              <a:rPr lang="en-US" sz="900" dirty="0">
-                <a:solidFill>
-                  <a:srgbClr val="6B7A72"/>
-                </a:solidFill>
-                <a:latin typeface="Calibri" pitchFamily="34" charset="0"/>
-                <a:ea typeface="Calibri" pitchFamily="34" charset="-122"/>
-                <a:cs typeface="Calibri" pitchFamily="34" charset="-120"/>
-              </a:rPr>
-              <a:t>Education, not advice.</a:t>
-            </a:r>
-            <a:endParaRPr lang="en-US" sz="900" dirty="0"/>
           </a:p>
         </p:txBody>
       </p:sp>
@@ -4546,6 +4624,45 @@
         </p:nvSpPr>
         <p:spPr>
           <a:xfrm>
+            <a:off x="548640" y="6419088"/>
+            <a:ext cx="3108960" cy="274320"/>
+          </a:xfrm>
+          <a:prstGeom prst="rect">
+            <a:avLst/>
+          </a:prstGeom>
+          <a:noFill/>
+          <a:ln/>
+        </p:spPr>
+        <p:txBody>
+          <a:bodyPr wrap="square" lIns="0" tIns="0" rIns="0" bIns="0" rtlCol="0" anchor="ctr"/>
+          <a:lstStyle/>
+          <a:p>
+            <a:pPr indent="0" marL="0">
+              <a:buNone/>
+            </a:pPr>
+            <a:r>
+              <a:rPr lang="en-US" sz="900" dirty="0">
+                <a:solidFill>
+                  <a:srgbClr val="6B7A72"/>
+                </a:solidFill>
+                <a:latin typeface="Calibri" pitchFamily="34" charset="0"/>
+                <a:ea typeface="Calibri" pitchFamily="34" charset="-122"/>
+                <a:cs typeface="Calibri" pitchFamily="34" charset="-120"/>
+              </a:rPr>
+              <a:t>Education, not advice.</a:t>
+            </a:r>
+            <a:endParaRPr lang="en-US" sz="900" dirty="0"/>
+          </a:p>
+        </p:txBody>
+      </p:sp>
+      <p:sp>
+        <p:nvSpPr>
+          <p:cNvPr id="3" name="Text 1"/>
+          <p:cNvSpPr txBox="1"/>
+          <p:nvPr/>
+        </p:nvSpPr>
+        <p:spPr>
+          <a:xfrm>
             <a:off x="822960" y="502920"/>
             <a:ext cx="9144000" cy="320040"/>
           </a:xfrm>
@@ -4579,7 +4696,7 @@
       </p:sp>
       <p:sp>
         <p:nvSpPr>
-          <p:cNvPr id="3" name="Text 1"/>
+          <p:cNvPr id="4" name="Text 2"/>
           <p:cNvSpPr txBox="1"/>
           <p:nvPr/>
         </p:nvSpPr>
@@ -6168,7 +6285,7 @@
                           <a:ea typeface="Calibri" pitchFamily="34" charset="-122"/>
                           <a:cs typeface="Calibri" pitchFamily="34" charset="-120"/>
                         </a:rPr>
-                        <a:t>Higher than 5 years ago</a:t>
+                        <a:t>Above four fiscal years earlier (1970 v 1966)</a:t>
                       </a:r>
                       <a:endParaRPr lang="en-US" sz="1350" dirty="0">
                         <a:latin typeface="Calibri" charset="0"/>
@@ -6842,7 +6959,7 @@
       </p:graphicFrame>
       <p:sp>
         <p:nvSpPr>
-          <p:cNvPr id="5" name="Text 2"/>
+          <p:cNvPr id="6" name="Text 3"/>
           <p:cNvSpPr txBox="1"/>
           <p:nvPr/>
         </p:nvSpPr>
@@ -6876,45 +6993,6 @@
               <a:t>Alphabet and Meta: fail the ten-year record, pass “some current dividend”. Same history, two correct answers.</a:t>
             </a:r>
             <a:endParaRPr lang="en-US" sz="1600" dirty="0"/>
-          </a:p>
-        </p:txBody>
-      </p:sp>
-      <p:sp>
-        <p:nvSpPr>
-          <p:cNvPr id="6" name="Text 3"/>
-          <p:cNvSpPr txBox="1"/>
-          <p:nvPr/>
-        </p:nvSpPr>
-        <p:spPr>
-          <a:xfrm>
-            <a:off x="548640" y="6419088"/>
-            <a:ext cx="3108960" cy="274320"/>
-          </a:xfrm>
-          <a:prstGeom prst="rect">
-            <a:avLst/>
-          </a:prstGeom>
-          <a:noFill/>
-          <a:ln/>
-        </p:spPr>
-        <p:txBody>
-          <a:bodyPr wrap="square" lIns="0" tIns="0" rIns="0" bIns="0" rtlCol="0" anchor="ctr"/>
-          <a:lstStyle/>
-          <a:p>
-            <a:pPr indent="0" marL="0">
-              <a:buNone/>
-            </a:pPr>
-            <a:r>
-              <a:rPr lang="en-US" sz="900" dirty="0">
-                <a:solidFill>
-                  <a:srgbClr val="6B7A72"/>
-                </a:solidFill>
-                <a:latin typeface="Calibri" pitchFamily="34" charset="0"/>
-                <a:ea typeface="Calibri" pitchFamily="34" charset="-122"/>
-                <a:cs typeface="Calibri" pitchFamily="34" charset="-120"/>
-              </a:rPr>
-              <a:t>Education, not advice.</a:t>
-            </a:r>
-            <a:endParaRPr lang="en-US" sz="900" dirty="0"/>
           </a:p>
         </p:txBody>
       </p:sp>
@@ -6997,6 +7075,45 @@
         </p:nvSpPr>
         <p:spPr>
           <a:xfrm>
+            <a:off x="548640" y="6419088"/>
+            <a:ext cx="3108960" cy="274320"/>
+          </a:xfrm>
+          <a:prstGeom prst="rect">
+            <a:avLst/>
+          </a:prstGeom>
+          <a:noFill/>
+          <a:ln/>
+        </p:spPr>
+        <p:txBody>
+          <a:bodyPr wrap="square" lIns="0" tIns="0" rIns="0" bIns="0" rtlCol="0" anchor="ctr"/>
+          <a:lstStyle/>
+          <a:p>
+            <a:pPr indent="0" marL="0">
+              <a:buNone/>
+            </a:pPr>
+            <a:r>
+              <a:rPr lang="en-US" sz="900" dirty="0">
+                <a:solidFill>
+                  <a:srgbClr val="A9B6AE"/>
+                </a:solidFill>
+                <a:latin typeface="Calibri" pitchFamily="34" charset="0"/>
+                <a:ea typeface="Calibri" pitchFamily="34" charset="-122"/>
+                <a:cs typeface="Calibri" pitchFamily="34" charset="-120"/>
+              </a:rPr>
+              <a:t>Education, not advice.</a:t>
+            </a:r>
+            <a:endParaRPr lang="en-US" sz="900" dirty="0"/>
+          </a:p>
+        </p:txBody>
+      </p:sp>
+      <p:sp>
+        <p:nvSpPr>
+          <p:cNvPr id="3" name="Text 1"/>
+          <p:cNvSpPr txBox="1"/>
+          <p:nvPr/>
+        </p:nvSpPr>
+        <p:spPr>
+          <a:xfrm>
             <a:off x="822960" y="731520"/>
             <a:ext cx="9144000" cy="365760"/>
           </a:xfrm>
@@ -7030,7 +7147,7 @@
       </p:sp>
       <p:sp>
         <p:nvSpPr>
-          <p:cNvPr id="3" name="Text 1"/>
+          <p:cNvPr id="4" name="Text 2"/>
           <p:cNvSpPr txBox="1"/>
           <p:nvPr/>
         </p:nvSpPr>
@@ -7069,7 +7186,7 @@
       </p:sp>
       <p:sp>
         <p:nvSpPr>
-          <p:cNvPr id="4" name="Shape 2"/>
+          <p:cNvPr id="5" name="Shape 3"/>
           <p:cNvSpPr/>
           <p:nvPr/>
         </p:nvSpPr>
@@ -7096,7 +7213,7 @@
       </p:sp>
       <p:sp>
         <p:nvSpPr>
-          <p:cNvPr id="5" name="Text 3"/>
+          <p:cNvPr id="6" name="Text 4"/>
           <p:cNvSpPr txBox="1"/>
           <p:nvPr/>
         </p:nvSpPr>
@@ -7135,7 +7252,7 @@
       </p:sp>
       <p:sp>
         <p:nvSpPr>
-          <p:cNvPr id="6" name="Shape 4"/>
+          <p:cNvPr id="7" name="Shape 5"/>
           <p:cNvSpPr/>
           <p:nvPr/>
         </p:nvSpPr>
@@ -7162,7 +7279,7 @@
       </p:sp>
       <p:sp>
         <p:nvSpPr>
-          <p:cNvPr id="7" name="Text 5"/>
+          <p:cNvPr id="8" name="Text 6"/>
           <p:cNvSpPr txBox="1"/>
           <p:nvPr/>
         </p:nvSpPr>
@@ -7201,7 +7318,7 @@
       </p:sp>
       <p:sp>
         <p:nvSpPr>
-          <p:cNvPr id="8" name="Text 6"/>
+          <p:cNvPr id="9" name="Text 7"/>
           <p:cNvSpPr txBox="1"/>
           <p:nvPr/>
         </p:nvSpPr>
@@ -7260,7 +7377,7 @@
       </p:sp>
       <p:sp>
         <p:nvSpPr>
-          <p:cNvPr id="9" name="Text 7"/>
+          <p:cNvPr id="10" name="Text 8"/>
           <p:cNvSpPr txBox="1"/>
           <p:nvPr/>
         </p:nvSpPr>
@@ -7340,6 +7457,45 @@
         </p:nvSpPr>
         <p:spPr>
           <a:xfrm>
+            <a:off x="548640" y="6419088"/>
+            <a:ext cx="3108960" cy="274320"/>
+          </a:xfrm>
+          <a:prstGeom prst="rect">
+            <a:avLst/>
+          </a:prstGeom>
+          <a:noFill/>
+          <a:ln/>
+        </p:spPr>
+        <p:txBody>
+          <a:bodyPr wrap="square" lIns="0" tIns="0" rIns="0" bIns="0" rtlCol="0" anchor="ctr"/>
+          <a:lstStyle/>
+          <a:p>
+            <a:pPr indent="0" marL="0">
+              <a:buNone/>
+            </a:pPr>
+            <a:r>
+              <a:rPr lang="en-US" sz="900" dirty="0">
+                <a:solidFill>
+                  <a:srgbClr val="6B7A72"/>
+                </a:solidFill>
+                <a:latin typeface="Calibri" pitchFamily="34" charset="0"/>
+                <a:ea typeface="Calibri" pitchFamily="34" charset="-122"/>
+                <a:cs typeface="Calibri" pitchFamily="34" charset="-120"/>
+              </a:rPr>
+              <a:t>Education, not advice.</a:t>
+            </a:r>
+            <a:endParaRPr lang="en-US" sz="900" dirty="0"/>
+          </a:p>
+        </p:txBody>
+      </p:sp>
+      <p:sp>
+        <p:nvSpPr>
+          <p:cNvPr id="3" name="Text 1"/>
+          <p:cNvSpPr txBox="1"/>
+          <p:nvPr/>
+        </p:nvSpPr>
+        <p:spPr>
+          <a:xfrm>
             <a:off x="822960" y="502920"/>
             <a:ext cx="9144000" cy="320040"/>
           </a:xfrm>
@@ -7373,7 +7529,7 @@
       </p:sp>
       <p:sp>
         <p:nvSpPr>
-          <p:cNvPr id="3" name="Text 1"/>
+          <p:cNvPr id="4" name="Text 2"/>
           <p:cNvSpPr txBox="1"/>
           <p:nvPr/>
         </p:nvSpPr>
@@ -7412,7 +7568,7 @@
       </p:sp>
       <p:sp>
         <p:nvSpPr>
-          <p:cNvPr id="4" name="Shape 2"/>
+          <p:cNvPr id="5" name="Shape 3"/>
           <p:cNvSpPr/>
           <p:nvPr/>
         </p:nvSpPr>
@@ -7446,7 +7602,7 @@
       </p:sp>
       <p:sp>
         <p:nvSpPr>
-          <p:cNvPr id="5" name="Text 3"/>
+          <p:cNvPr id="6" name="Text 4"/>
           <p:cNvSpPr txBox="1"/>
           <p:nvPr/>
         </p:nvSpPr>
@@ -7485,7 +7641,7 @@
       </p:sp>
       <p:sp>
         <p:nvSpPr>
-          <p:cNvPr id="6" name="Text 4"/>
+          <p:cNvPr id="7" name="Text 5"/>
           <p:cNvSpPr txBox="1"/>
           <p:nvPr/>
         </p:nvSpPr>
@@ -7527,7 +7683,7 @@
       </p:sp>
       <p:sp>
         <p:nvSpPr>
-          <p:cNvPr id="7" name="Shape 5"/>
+          <p:cNvPr id="8" name="Shape 6"/>
           <p:cNvSpPr/>
           <p:nvPr/>
         </p:nvSpPr>
@@ -7561,7 +7717,7 @@
       </p:sp>
       <p:sp>
         <p:nvSpPr>
-          <p:cNvPr id="8" name="Text 6"/>
+          <p:cNvPr id="9" name="Text 7"/>
           <p:cNvSpPr txBox="1"/>
           <p:nvPr/>
         </p:nvSpPr>
@@ -7600,7 +7756,7 @@
       </p:sp>
       <p:sp>
         <p:nvSpPr>
-          <p:cNvPr id="9" name="Text 7"/>
+          <p:cNvPr id="10" name="Text 8"/>
           <p:cNvSpPr txBox="1"/>
           <p:nvPr/>
         </p:nvSpPr>
@@ -7642,7 +7798,7 @@
       </p:sp>
       <p:sp>
         <p:nvSpPr>
-          <p:cNvPr id="10" name="Shape 8"/>
+          <p:cNvPr id="11" name="Shape 9"/>
           <p:cNvSpPr/>
           <p:nvPr/>
         </p:nvSpPr>
@@ -7676,7 +7832,7 @@
       </p:sp>
       <p:sp>
         <p:nvSpPr>
-          <p:cNvPr id="11" name="Text 9"/>
+          <p:cNvPr id="12" name="Text 10"/>
           <p:cNvSpPr txBox="1"/>
           <p:nvPr/>
         </p:nvSpPr>
@@ -7715,7 +7871,7 @@
       </p:sp>
       <p:sp>
         <p:nvSpPr>
-          <p:cNvPr id="12" name="Text 10"/>
+          <p:cNvPr id="13" name="Text 11"/>
           <p:cNvSpPr txBox="1"/>
           <p:nvPr/>
         </p:nvSpPr>
@@ -7757,7 +7913,7 @@
       </p:sp>
       <p:sp>
         <p:nvSpPr>
-          <p:cNvPr id="13" name="Text 11"/>
+          <p:cNvPr id="14" name="Text 12"/>
           <p:cNvSpPr txBox="1"/>
           <p:nvPr/>
         </p:nvSpPr>
@@ -7791,45 +7947,6 @@
               <a:t>Not cynicism. A habit.</a:t>
             </a:r>
             <a:endParaRPr lang="en-US" sz="2400" dirty="0"/>
-          </a:p>
-        </p:txBody>
-      </p:sp>
-      <p:sp>
-        <p:nvSpPr>
-          <p:cNvPr id="14" name="Text 12"/>
-          <p:cNvSpPr txBox="1"/>
-          <p:nvPr/>
-        </p:nvSpPr>
-        <p:spPr>
-          <a:xfrm>
-            <a:off x="548640" y="6419088"/>
-            <a:ext cx="3108960" cy="274320"/>
-          </a:xfrm>
-          <a:prstGeom prst="rect">
-            <a:avLst/>
-          </a:prstGeom>
-          <a:noFill/>
-          <a:ln/>
-        </p:spPr>
-        <p:txBody>
-          <a:bodyPr wrap="square" lIns="0" tIns="0" rIns="0" bIns="0" rtlCol="0" anchor="ctr"/>
-          <a:lstStyle/>
-          <a:p>
-            <a:pPr indent="0" marL="0">
-              <a:buNone/>
-            </a:pPr>
-            <a:r>
-              <a:rPr lang="en-US" sz="900" dirty="0">
-                <a:solidFill>
-                  <a:srgbClr val="6B7A72"/>
-                </a:solidFill>
-                <a:latin typeface="Calibri" pitchFamily="34" charset="0"/>
-                <a:ea typeface="Calibri" pitchFamily="34" charset="-122"/>
-                <a:cs typeface="Calibri" pitchFamily="34" charset="-120"/>
-              </a:rPr>
-              <a:t>Education, not advice.</a:t>
-            </a:r>
-            <a:endParaRPr lang="en-US" sz="900" dirty="0"/>
           </a:p>
         </p:txBody>
       </p:sp>
@@ -7912,6 +8029,45 @@
         </p:nvSpPr>
         <p:spPr>
           <a:xfrm>
+            <a:off x="548640" y="6419088"/>
+            <a:ext cx="3108960" cy="274320"/>
+          </a:xfrm>
+          <a:prstGeom prst="rect">
+            <a:avLst/>
+          </a:prstGeom>
+          <a:noFill/>
+          <a:ln/>
+        </p:spPr>
+        <p:txBody>
+          <a:bodyPr wrap="square" lIns="0" tIns="0" rIns="0" bIns="0" rtlCol="0" anchor="ctr"/>
+          <a:lstStyle/>
+          <a:p>
+            <a:pPr indent="0" marL="0">
+              <a:buNone/>
+            </a:pPr>
+            <a:r>
+              <a:rPr lang="en-US" sz="900" dirty="0">
+                <a:solidFill>
+                  <a:srgbClr val="6B7A72"/>
+                </a:solidFill>
+                <a:latin typeface="Calibri" pitchFamily="34" charset="0"/>
+                <a:ea typeface="Calibri" pitchFamily="34" charset="-122"/>
+                <a:cs typeface="Calibri" pitchFamily="34" charset="-120"/>
+              </a:rPr>
+              <a:t>Education, not advice.</a:t>
+            </a:r>
+            <a:endParaRPr lang="en-US" sz="900" dirty="0"/>
+          </a:p>
+        </p:txBody>
+      </p:sp>
+      <p:sp>
+        <p:nvSpPr>
+          <p:cNvPr id="3" name="Text 1"/>
+          <p:cNvSpPr txBox="1"/>
+          <p:nvPr/>
+        </p:nvSpPr>
+        <p:spPr>
+          <a:xfrm>
             <a:off x="822960" y="502920"/>
             <a:ext cx="9144000" cy="320040"/>
           </a:xfrm>
@@ -7945,7 +8101,7 @@
       </p:sp>
       <p:sp>
         <p:nvSpPr>
-          <p:cNvPr id="3" name="Text 1"/>
+          <p:cNvPr id="4" name="Text 2"/>
           <p:cNvSpPr txBox="1"/>
           <p:nvPr/>
         </p:nvSpPr>
@@ -7984,7 +8140,7 @@
       </p:sp>
       <p:sp>
         <p:nvSpPr>
-          <p:cNvPr id="4" name="Shape 2"/>
+          <p:cNvPr id="5" name="Shape 3"/>
           <p:cNvSpPr/>
           <p:nvPr/>
         </p:nvSpPr>
@@ -8011,7 +8167,7 @@
       </p:sp>
       <p:sp>
         <p:nvSpPr>
-          <p:cNvPr id="5" name="Text 3"/>
+          <p:cNvPr id="6" name="Text 4"/>
           <p:cNvSpPr txBox="1"/>
           <p:nvPr/>
         </p:nvSpPr>
@@ -8050,7 +8206,7 @@
       </p:sp>
       <p:sp>
         <p:nvSpPr>
-          <p:cNvPr id="6" name="Text 4"/>
+          <p:cNvPr id="7" name="Text 5"/>
           <p:cNvSpPr txBox="1"/>
           <p:nvPr/>
         </p:nvSpPr>
@@ -8089,7 +8245,7 @@
       </p:sp>
       <p:sp>
         <p:nvSpPr>
-          <p:cNvPr id="7" name="Text 5"/>
+          <p:cNvPr id="8" name="Text 6"/>
           <p:cNvSpPr txBox="1"/>
           <p:nvPr/>
         </p:nvSpPr>
@@ -8131,7 +8287,7 @@
       </p:sp>
       <p:sp>
         <p:nvSpPr>
-          <p:cNvPr id="8" name="Shape 6"/>
+          <p:cNvPr id="9" name="Shape 7"/>
           <p:cNvSpPr/>
           <p:nvPr/>
         </p:nvSpPr>
@@ -8158,7 +8314,7 @@
       </p:sp>
       <p:sp>
         <p:nvSpPr>
-          <p:cNvPr id="9" name="Text 7"/>
+          <p:cNvPr id="10" name="Text 8"/>
           <p:cNvSpPr txBox="1"/>
           <p:nvPr/>
         </p:nvSpPr>
@@ -8197,7 +8353,7 @@
       </p:sp>
       <p:sp>
         <p:nvSpPr>
-          <p:cNvPr id="10" name="Text 8"/>
+          <p:cNvPr id="11" name="Text 9"/>
           <p:cNvSpPr txBox="1"/>
           <p:nvPr/>
         </p:nvSpPr>
@@ -8236,7 +8392,7 @@
       </p:sp>
       <p:sp>
         <p:nvSpPr>
-          <p:cNvPr id="11" name="Text 9"/>
+          <p:cNvPr id="12" name="Text 10"/>
           <p:cNvSpPr txBox="1"/>
           <p:nvPr/>
         </p:nvSpPr>
@@ -8278,7 +8434,7 @@
       </p:sp>
       <p:sp>
         <p:nvSpPr>
-          <p:cNvPr id="12" name="Shape 10"/>
+          <p:cNvPr id="13" name="Shape 11"/>
           <p:cNvSpPr/>
           <p:nvPr/>
         </p:nvSpPr>
@@ -8305,7 +8461,7 @@
       </p:sp>
       <p:sp>
         <p:nvSpPr>
-          <p:cNvPr id="13" name="Text 11"/>
+          <p:cNvPr id="14" name="Text 12"/>
           <p:cNvSpPr txBox="1"/>
           <p:nvPr/>
         </p:nvSpPr>
@@ -8344,7 +8500,7 @@
       </p:sp>
       <p:sp>
         <p:nvSpPr>
-          <p:cNvPr id="14" name="Text 12"/>
+          <p:cNvPr id="15" name="Text 13"/>
           <p:cNvSpPr txBox="1"/>
           <p:nvPr/>
         </p:nvSpPr>
@@ -8383,7 +8539,7 @@
       </p:sp>
       <p:sp>
         <p:nvSpPr>
-          <p:cNvPr id="15" name="Text 13"/>
+          <p:cNvPr id="16" name="Text 14"/>
           <p:cNvSpPr txBox="1"/>
           <p:nvPr/>
         </p:nvSpPr>
@@ -8425,7 +8581,7 @@
       </p:sp>
       <p:sp>
         <p:nvSpPr>
-          <p:cNvPr id="16" name="Shape 14"/>
+          <p:cNvPr id="17" name="Shape 15"/>
           <p:cNvSpPr/>
           <p:nvPr/>
         </p:nvSpPr>
@@ -8452,7 +8608,7 @@
       </p:sp>
       <p:sp>
         <p:nvSpPr>
-          <p:cNvPr id="17" name="Text 15"/>
+          <p:cNvPr id="18" name="Text 16"/>
           <p:cNvSpPr txBox="1"/>
           <p:nvPr/>
         </p:nvSpPr>
@@ -8491,7 +8647,7 @@
       </p:sp>
       <p:sp>
         <p:nvSpPr>
-          <p:cNvPr id="18" name="Text 16"/>
+          <p:cNvPr id="19" name="Text 17"/>
           <p:cNvSpPr txBox="1"/>
           <p:nvPr/>
         </p:nvSpPr>
@@ -8530,7 +8686,7 @@
       </p:sp>
       <p:sp>
         <p:nvSpPr>
-          <p:cNvPr id="19" name="Text 17"/>
+          <p:cNvPr id="20" name="Text 18"/>
           <p:cNvSpPr txBox="1"/>
           <p:nvPr/>
         </p:nvSpPr>
@@ -8572,7 +8728,7 @@
       </p:sp>
       <p:sp>
         <p:nvSpPr>
-          <p:cNvPr id="20" name="Shape 18"/>
+          <p:cNvPr id="21" name="Shape 19"/>
           <p:cNvSpPr/>
           <p:nvPr/>
         </p:nvSpPr>
@@ -8599,7 +8755,7 @@
       </p:sp>
       <p:sp>
         <p:nvSpPr>
-          <p:cNvPr id="21" name="Text 19"/>
+          <p:cNvPr id="22" name="Text 20"/>
           <p:cNvSpPr txBox="1"/>
           <p:nvPr/>
         </p:nvSpPr>
@@ -8633,45 +8789,6 @@
               <a:t>[ course URL ]/explain/NVDA</a:t>
             </a:r>
             <a:endParaRPr lang="en-US" sz="2000" dirty="0"/>
-          </a:p>
-        </p:txBody>
-      </p:sp>
-      <p:sp>
-        <p:nvSpPr>
-          <p:cNvPr id="22" name="Text 20"/>
-          <p:cNvSpPr txBox="1"/>
-          <p:nvPr/>
-        </p:nvSpPr>
-        <p:spPr>
-          <a:xfrm>
-            <a:off x="548640" y="6419088"/>
-            <a:ext cx="3108960" cy="274320"/>
-          </a:xfrm>
-          <a:prstGeom prst="rect">
-            <a:avLst/>
-          </a:prstGeom>
-          <a:noFill/>
-          <a:ln/>
-        </p:spPr>
-        <p:txBody>
-          <a:bodyPr wrap="square" lIns="0" tIns="0" rIns="0" bIns="0" rtlCol="0" anchor="ctr"/>
-          <a:lstStyle/>
-          <a:p>
-            <a:pPr indent="0" marL="0">
-              <a:buNone/>
-            </a:pPr>
-            <a:r>
-              <a:rPr lang="en-US" sz="900" dirty="0">
-                <a:solidFill>
-                  <a:srgbClr val="6B7A72"/>
-                </a:solidFill>
-                <a:latin typeface="Calibri" pitchFamily="34" charset="0"/>
-                <a:ea typeface="Calibri" pitchFamily="34" charset="-122"/>
-                <a:cs typeface="Calibri" pitchFamily="34" charset="-120"/>
-              </a:rPr>
-              <a:t>Education, not advice.</a:t>
-            </a:r>
-            <a:endParaRPr lang="en-US" sz="900" dirty="0"/>
           </a:p>
         </p:txBody>
       </p:sp>
@@ -8715,6 +8832,45 @@
         </p:nvSpPr>
         <p:spPr>
           <a:xfrm>
+            <a:off x="548640" y="6419088"/>
+            <a:ext cx="3108960" cy="274320"/>
+          </a:xfrm>
+          <a:prstGeom prst="rect">
+            <a:avLst/>
+          </a:prstGeom>
+          <a:noFill/>
+          <a:ln/>
+        </p:spPr>
+        <p:txBody>
+          <a:bodyPr wrap="square" lIns="0" tIns="0" rIns="0" bIns="0" rtlCol="0" anchor="ctr"/>
+          <a:lstStyle/>
+          <a:p>
+            <a:pPr indent="0" marL="0">
+              <a:buNone/>
+            </a:pPr>
+            <a:r>
+              <a:rPr lang="en-US" sz="900" dirty="0">
+                <a:solidFill>
+                  <a:srgbClr val="6B7A72"/>
+                </a:solidFill>
+                <a:latin typeface="Calibri" pitchFamily="34" charset="0"/>
+                <a:ea typeface="Calibri" pitchFamily="34" charset="-122"/>
+                <a:cs typeface="Calibri" pitchFamily="34" charset="-120"/>
+              </a:rPr>
+              <a:t>Education, not advice.</a:t>
+            </a:r>
+            <a:endParaRPr lang="en-US" sz="900" dirty="0"/>
+          </a:p>
+        </p:txBody>
+      </p:sp>
+      <p:sp>
+        <p:nvSpPr>
+          <p:cNvPr id="3" name="Text 1"/>
+          <p:cNvSpPr txBox="1"/>
+          <p:nvPr/>
+        </p:nvSpPr>
+        <p:spPr>
+          <a:xfrm>
             <a:off x="822960" y="502920"/>
             <a:ext cx="9144000" cy="320040"/>
           </a:xfrm>
@@ -8748,7 +8904,7 @@
       </p:sp>
       <p:sp>
         <p:nvSpPr>
-          <p:cNvPr id="3" name="Text 1"/>
+          <p:cNvPr id="4" name="Text 2"/>
           <p:cNvSpPr txBox="1"/>
           <p:nvPr/>
         </p:nvSpPr>
@@ -8787,7 +8943,7 @@
       </p:sp>
       <p:sp>
         <p:nvSpPr>
-          <p:cNvPr id="4" name="Shape 2"/>
+          <p:cNvPr id="5" name="Shape 3"/>
           <p:cNvSpPr/>
           <p:nvPr/>
         </p:nvSpPr>
@@ -8821,7 +8977,7 @@
       </p:sp>
       <p:sp>
         <p:nvSpPr>
-          <p:cNvPr id="5" name="Text 3"/>
+          <p:cNvPr id="6" name="Text 4"/>
           <p:cNvSpPr txBox="1"/>
           <p:nvPr/>
         </p:nvSpPr>
@@ -8860,7 +9016,7 @@
       </p:sp>
       <p:sp>
         <p:nvSpPr>
-          <p:cNvPr id="6" name="Text 4"/>
+          <p:cNvPr id="7" name="Text 5"/>
           <p:cNvSpPr txBox="1"/>
           <p:nvPr/>
         </p:nvSpPr>
@@ -8902,7 +9058,7 @@
       </p:sp>
       <p:sp>
         <p:nvSpPr>
-          <p:cNvPr id="7" name="Shape 5"/>
+          <p:cNvPr id="8" name="Shape 6"/>
           <p:cNvSpPr/>
           <p:nvPr/>
         </p:nvSpPr>
@@ -8936,7 +9092,7 @@
       </p:sp>
       <p:sp>
         <p:nvSpPr>
-          <p:cNvPr id="8" name="Text 6"/>
+          <p:cNvPr id="9" name="Text 7"/>
           <p:cNvSpPr txBox="1"/>
           <p:nvPr/>
         </p:nvSpPr>
@@ -8975,7 +9131,7 @@
       </p:sp>
       <p:sp>
         <p:nvSpPr>
-          <p:cNvPr id="9" name="Text 7"/>
+          <p:cNvPr id="10" name="Text 8"/>
           <p:cNvSpPr txBox="1"/>
           <p:nvPr/>
         </p:nvSpPr>
@@ -9017,7 +9173,7 @@
       </p:sp>
       <p:sp>
         <p:nvSpPr>
-          <p:cNvPr id="10" name="Shape 8"/>
+          <p:cNvPr id="11" name="Shape 9"/>
           <p:cNvSpPr/>
           <p:nvPr/>
         </p:nvSpPr>
@@ -9051,7 +9207,7 @@
       </p:sp>
       <p:sp>
         <p:nvSpPr>
-          <p:cNvPr id="11" name="Text 9"/>
+          <p:cNvPr id="12" name="Text 10"/>
           <p:cNvSpPr txBox="1"/>
           <p:nvPr/>
         </p:nvSpPr>
@@ -9090,7 +9246,7 @@
       </p:sp>
       <p:sp>
         <p:nvSpPr>
-          <p:cNvPr id="12" name="Text 10"/>
+          <p:cNvPr id="13" name="Text 11"/>
           <p:cNvSpPr txBox="1"/>
           <p:nvPr/>
         </p:nvSpPr>
@@ -9132,7 +9288,7 @@
       </p:sp>
       <p:sp>
         <p:nvSpPr>
-          <p:cNvPr id="13" name="Text 11"/>
+          <p:cNvPr id="14" name="Text 12"/>
           <p:cNvSpPr txBox="1"/>
           <p:nvPr/>
         </p:nvSpPr>
@@ -9166,45 +9322,6 @@
               <a:t>A clean page is not a reason to stop checking. It's what checking looks like when it passes.</a:t>
             </a:r>
             <a:endParaRPr lang="en-US" sz="1700" dirty="0"/>
-          </a:p>
-        </p:txBody>
-      </p:sp>
-      <p:sp>
-        <p:nvSpPr>
-          <p:cNvPr id="14" name="Text 12"/>
-          <p:cNvSpPr txBox="1"/>
-          <p:nvPr/>
-        </p:nvSpPr>
-        <p:spPr>
-          <a:xfrm>
-            <a:off x="548640" y="6419088"/>
-            <a:ext cx="3108960" cy="274320"/>
-          </a:xfrm>
-          <a:prstGeom prst="rect">
-            <a:avLst/>
-          </a:prstGeom>
-          <a:noFill/>
-          <a:ln/>
-        </p:spPr>
-        <p:txBody>
-          <a:bodyPr wrap="square" lIns="0" tIns="0" rIns="0" bIns="0" rtlCol="0" anchor="ctr"/>
-          <a:lstStyle/>
-          <a:p>
-            <a:pPr indent="0" marL="0">
-              <a:buNone/>
-            </a:pPr>
-            <a:r>
-              <a:rPr lang="en-US" sz="900" dirty="0">
-                <a:solidFill>
-                  <a:srgbClr val="6B7A72"/>
-                </a:solidFill>
-                <a:latin typeface="Calibri" pitchFamily="34" charset="0"/>
-                <a:ea typeface="Calibri" pitchFamily="34" charset="-122"/>
-                <a:cs typeface="Calibri" pitchFamily="34" charset="-120"/>
-              </a:rPr>
-              <a:t>Education, not advice.</a:t>
-            </a:r>
-            <a:endParaRPr lang="en-US" sz="900" dirty="0"/>
           </a:p>
         </p:txBody>
       </p:sp>
@@ -9248,6 +9365,45 @@
         </p:nvSpPr>
         <p:spPr>
           <a:xfrm>
+            <a:off x="548640" y="6419088"/>
+            <a:ext cx="3108960" cy="274320"/>
+          </a:xfrm>
+          <a:prstGeom prst="rect">
+            <a:avLst/>
+          </a:prstGeom>
+          <a:noFill/>
+          <a:ln/>
+        </p:spPr>
+        <p:txBody>
+          <a:bodyPr wrap="square" lIns="0" tIns="0" rIns="0" bIns="0" rtlCol="0" anchor="ctr"/>
+          <a:lstStyle/>
+          <a:p>
+            <a:pPr indent="0" marL="0">
+              <a:buNone/>
+            </a:pPr>
+            <a:r>
+              <a:rPr lang="en-US" sz="900" dirty="0">
+                <a:solidFill>
+                  <a:srgbClr val="6B7A72"/>
+                </a:solidFill>
+                <a:latin typeface="Calibri" pitchFamily="34" charset="0"/>
+                <a:ea typeface="Calibri" pitchFamily="34" charset="-122"/>
+                <a:cs typeface="Calibri" pitchFamily="34" charset="-120"/>
+              </a:rPr>
+              <a:t>Education, not advice.</a:t>
+            </a:r>
+            <a:endParaRPr lang="en-US" sz="900" dirty="0"/>
+          </a:p>
+        </p:txBody>
+      </p:sp>
+      <p:sp>
+        <p:nvSpPr>
+          <p:cNvPr id="3" name="Text 1"/>
+          <p:cNvSpPr txBox="1"/>
+          <p:nvPr/>
+        </p:nvSpPr>
+        <p:spPr>
+          <a:xfrm>
             <a:off x="822960" y="502920"/>
             <a:ext cx="9144000" cy="320040"/>
           </a:xfrm>
@@ -9281,7 +9437,7 @@
       </p:sp>
       <p:sp>
         <p:nvSpPr>
-          <p:cNvPr id="3" name="Text 1"/>
+          <p:cNvPr id="4" name="Text 2"/>
           <p:cNvSpPr txBox="1"/>
           <p:nvPr/>
         </p:nvSpPr>
@@ -9320,7 +9476,7 @@
       </p:sp>
       <p:sp>
         <p:nvSpPr>
-          <p:cNvPr id="4" name="Shape 2"/>
+          <p:cNvPr id="5" name="Shape 3"/>
           <p:cNvSpPr/>
           <p:nvPr/>
         </p:nvSpPr>
@@ -9354,7 +9510,7 @@
       </p:sp>
       <p:sp>
         <p:nvSpPr>
-          <p:cNvPr id="5" name="Text 3"/>
+          <p:cNvPr id="6" name="Text 4"/>
           <p:cNvSpPr txBox="1"/>
           <p:nvPr/>
         </p:nvSpPr>
@@ -9393,7 +9549,7 @@
       </p:sp>
       <p:sp>
         <p:nvSpPr>
-          <p:cNvPr id="6" name="Text 4"/>
+          <p:cNvPr id="7" name="Text 5"/>
           <p:cNvSpPr txBox="1"/>
           <p:nvPr/>
         </p:nvSpPr>
@@ -9435,7 +9591,7 @@
       </p:sp>
       <p:sp>
         <p:nvSpPr>
-          <p:cNvPr id="7" name="Shape 5"/>
+          <p:cNvPr id="8" name="Shape 6"/>
           <p:cNvSpPr/>
           <p:nvPr/>
         </p:nvSpPr>
@@ -9469,7 +9625,7 @@
       </p:sp>
       <p:sp>
         <p:nvSpPr>
-          <p:cNvPr id="8" name="Text 6"/>
+          <p:cNvPr id="9" name="Text 7"/>
           <p:cNvSpPr txBox="1"/>
           <p:nvPr/>
         </p:nvSpPr>
@@ -9508,7 +9664,7 @@
       </p:sp>
       <p:sp>
         <p:nvSpPr>
-          <p:cNvPr id="9" name="Text 7"/>
+          <p:cNvPr id="10" name="Text 8"/>
           <p:cNvSpPr txBox="1"/>
           <p:nvPr/>
         </p:nvSpPr>
@@ -9550,7 +9706,7 @@
       </p:sp>
       <p:sp>
         <p:nvSpPr>
-          <p:cNvPr id="10" name="Shape 8"/>
+          <p:cNvPr id="11" name="Shape 9"/>
           <p:cNvSpPr/>
           <p:nvPr/>
         </p:nvSpPr>
@@ -9584,7 +9740,7 @@
       </p:sp>
       <p:sp>
         <p:nvSpPr>
-          <p:cNvPr id="11" name="Text 9"/>
+          <p:cNvPr id="12" name="Text 10"/>
           <p:cNvSpPr txBox="1"/>
           <p:nvPr/>
         </p:nvSpPr>
@@ -9623,7 +9779,7 @@
       </p:sp>
       <p:sp>
         <p:nvSpPr>
-          <p:cNvPr id="12" name="Text 10"/>
+          <p:cNvPr id="13" name="Text 11"/>
           <p:cNvSpPr txBox="1"/>
           <p:nvPr/>
         </p:nvSpPr>
@@ -9665,7 +9821,7 @@
       </p:sp>
       <p:sp>
         <p:nvSpPr>
-          <p:cNvPr id="13" name="Text 11"/>
+          <p:cNvPr id="14" name="Text 12"/>
           <p:cNvSpPr txBox="1"/>
           <p:nvPr/>
         </p:nvSpPr>
@@ -9702,45 +9858,6 @@
               <a:t>GM, 16 Oct 2026: 14.8× on the average — passes the defensive test. 25.6× on the latest (charge) year — fails the enterprising cut. Both are correct. Which did Graham ask for, and where?</a:t>
             </a:r>
             <a:endParaRPr lang="en-US" sz="1600" dirty="0"/>
-          </a:p>
-        </p:txBody>
-      </p:sp>
-      <p:sp>
-        <p:nvSpPr>
-          <p:cNvPr id="14" name="Text 12"/>
-          <p:cNvSpPr txBox="1"/>
-          <p:nvPr/>
-        </p:nvSpPr>
-        <p:spPr>
-          <a:xfrm>
-            <a:off x="548640" y="6419088"/>
-            <a:ext cx="3108960" cy="274320"/>
-          </a:xfrm>
-          <a:prstGeom prst="rect">
-            <a:avLst/>
-          </a:prstGeom>
-          <a:noFill/>
-          <a:ln/>
-        </p:spPr>
-        <p:txBody>
-          <a:bodyPr wrap="square" lIns="0" tIns="0" rIns="0" bIns="0" rtlCol="0" anchor="ctr"/>
-          <a:lstStyle/>
-          <a:p>
-            <a:pPr indent="0" marL="0">
-              <a:buNone/>
-            </a:pPr>
-            <a:r>
-              <a:rPr lang="en-US" sz="900" dirty="0">
-                <a:solidFill>
-                  <a:srgbClr val="6B7A72"/>
-                </a:solidFill>
-                <a:latin typeface="Calibri" pitchFamily="34" charset="0"/>
-                <a:ea typeface="Calibri" pitchFamily="34" charset="-122"/>
-                <a:cs typeface="Calibri" pitchFamily="34" charset="-120"/>
-              </a:rPr>
-              <a:t>Education, not advice.</a:t>
-            </a:r>
-            <a:endParaRPr lang="en-US" sz="900" dirty="0"/>
           </a:p>
         </p:txBody>
       </p:sp>
